--- a/PIA.pptx
+++ b/PIA.pptx
@@ -115,10 +115,25 @@
   <pc:docChgLst>
     <pc:chgData name="Perla Marlene Viera Gonzalez" userId="f60b178c-211f-4669-ad47-16adb900e3e3" providerId="ADAL" clId="{F9442F68-6B97-416D-869C-8F32AC6F21BE}"/>
     <pc:docChg chg="undo custSel modSld">
-      <pc:chgData name="Perla Marlene Viera Gonzalez" userId="f60b178c-211f-4669-ad47-16adb900e3e3" providerId="ADAL" clId="{F9442F68-6B97-416D-869C-8F32AC6F21BE}" dt="2026-03-23T16:38:47.818" v="2" actId="20577"/>
+      <pc:chgData name="Perla Marlene Viera Gonzalez" userId="f60b178c-211f-4669-ad47-16adb900e3e3" providerId="ADAL" clId="{F9442F68-6B97-416D-869C-8F32AC6F21BE}" dt="2026-03-23T18:55:02.911" v="16" actId="20577"/>
       <pc:docMkLst>
         <pc:docMk/>
       </pc:docMkLst>
+      <pc:sldChg chg="modSp mod">
+        <pc:chgData name="Perla Marlene Viera Gonzalez" userId="f60b178c-211f-4669-ad47-16adb900e3e3" providerId="ADAL" clId="{F9442F68-6B97-416D-869C-8F32AC6F21BE}" dt="2026-03-23T18:55:02.911" v="16" actId="20577"/>
+        <pc:sldMkLst>
+          <pc:docMk/>
+          <pc:sldMk cId="3614599647" sldId="258"/>
+        </pc:sldMkLst>
+        <pc:graphicFrameChg chg="modGraphic">
+          <ac:chgData name="Perla Marlene Viera Gonzalez" userId="f60b178c-211f-4669-ad47-16adb900e3e3" providerId="ADAL" clId="{F9442F68-6B97-416D-869C-8F32AC6F21BE}" dt="2026-03-23T18:55:02.911" v="16" actId="20577"/>
+          <ac:graphicFrameMkLst>
+            <pc:docMk/>
+            <pc:sldMk cId="3614599647" sldId="258"/>
+            <ac:graphicFrameMk id="4" creationId="{C2D159B6-7DA6-5875-2330-FDFC553C9696}"/>
+          </ac:graphicFrameMkLst>
+        </pc:graphicFrameChg>
+      </pc:sldChg>
       <pc:sldChg chg="modSp mod">
         <pc:chgData name="Perla Marlene Viera Gonzalez" userId="f60b178c-211f-4669-ad47-16adb900e3e3" providerId="ADAL" clId="{F9442F68-6B97-416D-869C-8F32AC6F21BE}" dt="2026-03-23T16:38:47.818" v="2" actId="20577"/>
         <pc:sldMkLst>
@@ -3779,7 +3794,7 @@
             <p:ph idx="1"/>
             <p:extLst>
               <p:ext uri="{D42A27DB-BD31-4B8C-83A1-F6EECF244321}">
-                <p14:modId xmlns:p14="http://schemas.microsoft.com/office/powerpoint/2010/main" val="548559805"/>
+                <p14:modId xmlns:p14="http://schemas.microsoft.com/office/powerpoint/2010/main" val="718690686"/>
               </p:ext>
             </p:extLst>
           </p:nvPr>
@@ -4057,10 +4072,10 @@
                         <a:buNone/>
                       </a:pPr>
                       <a:r>
-                        <a:rPr lang="es-MX" sz="2000" kern="100" dirty="0">
+                        <a:rPr lang="es-MX" sz="2000" kern="100">
                           <a:effectLst/>
                         </a:rPr>
-                        <a:t>27 marzo</a:t>
+                        <a:t>27 marzo (13 de abril)</a:t>
                       </a:r>
                       <a:endParaRPr lang="es-MX" sz="2000" kern="100" dirty="0">
                         <a:effectLst/>
